--- a/submission/SETU_pitch.pptx
+++ b/submission/SETU_pitch.pptx
@@ -7253,71 +7253,10 @@
                 <a:ea typeface="Calibri" pitchFamily="34" charset="-122"/>
                 <a:cs typeface="Calibri" pitchFamily="34" charset="-120"/>
               </a:rPr>
-              <a:t>Hexa-Router with measured battery draw</a:t>
+              <a:t>Document scanning — prescription to care plan</a:t>
             </a:r>
             <a:endParaRPr lang="en-US" sz="1300" dirty="0"/>
           </a:p>
-        </p:txBody>
-      </p:sp>
-      <p:sp>
-        <p:nvSpPr>
-          <p:cNvPr id="5" name="Text 3"/>
-          <p:cNvSpPr txBox="1"/>
-          <p:nvPr/>
-        </p:nvSpPr>
-        <p:spPr>
-          <a:xfrm>
-            <a:off x="6309360" y="1234440"/>
-            <a:ext cx="5212080" cy="365760"/>
-          </a:xfrm>
-          <a:prstGeom prst="rect">
-            <a:avLst/>
-          </a:prstGeom>
-          <a:noFill/>
-          <a:ln/>
-        </p:spPr>
-        <p:txBody>
-          <a:bodyPr wrap="square" lIns="0" tIns="0" rIns="0" bIns="0" rtlCol="0" anchor="ctr"/>
-          <a:lstStyle/>
-          <a:p>
-            <a:pPr indent="0" marL="0">
-              <a:buNone/>
-            </a:pPr>
-            <a:r>
-              <a:rPr lang="en-US" sz="1800" b="1" dirty="0">
-                <a:solidFill>
-                  <a:srgbClr val="B3261E"/>
-                </a:solidFill>
-                <a:latin typeface="Cambria" pitchFamily="34" charset="0"/>
-                <a:ea typeface="Cambria" pitchFamily="34" charset="-122"/>
-                <a:cs typeface="Cambria" pitchFamily="34" charset="-120"/>
-              </a:rPr>
-              <a:t>Honestly not finished</a:t>
-            </a:r>
-            <a:endParaRPr lang="en-US" sz="1800" dirty="0"/>
-          </a:p>
-        </p:txBody>
-      </p:sp>
-      <p:sp>
-        <p:nvSpPr>
-          <p:cNvPr id="6" name="Text 4"/>
-          <p:cNvSpPr txBox="1"/>
-          <p:nvPr/>
-        </p:nvSpPr>
-        <p:spPr>
-          <a:xfrm>
-            <a:off x="6309360" y="1645920"/>
-            <a:ext cx="5212080" cy="2194560"/>
-          </a:xfrm>
-          <a:prstGeom prst="rect">
-            <a:avLst/>
-          </a:prstGeom>
-          <a:noFill/>
-          <a:ln/>
-        </p:spPr>
-        <p:txBody>
-          <a:bodyPr wrap="square" lIns="0" tIns="0" rIns="0" bIns="0" rtlCol="0" anchor="ctr"/>
-          <a:lstStyle/>
           <a:p>
             <a:pPr marL="342900" indent="-342900">
               <a:spcAft>
@@ -7335,10 +7274,71 @@
                 <a:ea typeface="Calibri" pitchFamily="34" charset="-122"/>
                 <a:cs typeface="Calibri" pitchFamily="34" charset="-120"/>
               </a:rPr>
-              <a:t>No Snapdragon device — AI Hub profiling harness is built and one command away</a:t>
+              <a:t>Hexa-Router with measured battery draw</a:t>
             </a:r>
             <a:endParaRPr lang="en-US" sz="1300" dirty="0"/>
           </a:p>
+        </p:txBody>
+      </p:sp>
+      <p:sp>
+        <p:nvSpPr>
+          <p:cNvPr id="5" name="Text 3"/>
+          <p:cNvSpPr txBox="1"/>
+          <p:nvPr/>
+        </p:nvSpPr>
+        <p:spPr>
+          <a:xfrm>
+            <a:off x="6309360" y="1234440"/>
+            <a:ext cx="5212080" cy="365760"/>
+          </a:xfrm>
+          <a:prstGeom prst="rect">
+            <a:avLst/>
+          </a:prstGeom>
+          <a:noFill/>
+          <a:ln/>
+        </p:spPr>
+        <p:txBody>
+          <a:bodyPr wrap="square" lIns="0" tIns="0" rIns="0" bIns="0" rtlCol="0" anchor="ctr"/>
+          <a:lstStyle/>
+          <a:p>
+            <a:pPr indent="0" marL="0">
+              <a:buNone/>
+            </a:pPr>
+            <a:r>
+              <a:rPr lang="en-US" sz="1800" b="1" dirty="0">
+                <a:solidFill>
+                  <a:srgbClr val="B3261E"/>
+                </a:solidFill>
+                <a:latin typeface="Cambria" pitchFamily="34" charset="0"/>
+                <a:ea typeface="Cambria" pitchFamily="34" charset="-122"/>
+                <a:cs typeface="Cambria" pitchFamily="34" charset="-120"/>
+              </a:rPr>
+              <a:t>Honestly not finished</a:t>
+            </a:r>
+            <a:endParaRPr lang="en-US" sz="1800" dirty="0"/>
+          </a:p>
+        </p:txBody>
+      </p:sp>
+      <p:sp>
+        <p:nvSpPr>
+          <p:cNvPr id="6" name="Text 4"/>
+          <p:cNvSpPr txBox="1"/>
+          <p:nvPr/>
+        </p:nvSpPr>
+        <p:spPr>
+          <a:xfrm>
+            <a:off x="6309360" y="1645920"/>
+            <a:ext cx="5212080" cy="2194560"/>
+          </a:xfrm>
+          <a:prstGeom prst="rect">
+            <a:avLst/>
+          </a:prstGeom>
+          <a:noFill/>
+          <a:ln/>
+        </p:spPr>
+        <p:txBody>
+          <a:bodyPr wrap="square" lIns="0" tIns="0" rIns="0" bIns="0" rtlCol="0" anchor="ctr"/>
+          <a:lstStyle/>
           <a:p>
             <a:pPr marL="342900" indent="-342900">
               <a:spcAft>
@@ -7356,7 +7356,7 @@
                 <a:ea typeface="Calibri" pitchFamily="34" charset="-122"/>
                 <a:cs typeface="Calibri" pitchFamily="34" charset="-120"/>
               </a:rPr>
-              <a:t>Reasoning path still uses the grounded extractive backend, not the 3B LLM</a:t>
+              <a:t>No Snapdragon device — AI Hub profiling harness is built and one command away</a:t>
             </a:r>
             <a:endParaRPr lang="en-US" sz="1300" dirty="0"/>
           </a:p>
@@ -7377,7 +7377,7 @@
                 <a:ea typeface="Calibri" pitchFamily="34" charset="-122"/>
                 <a:cs typeface="Calibri" pitchFamily="34" charset="-120"/>
               </a:rPr>
-              <a:t>Marathi, Bengali, Punjabi have no working checkpoint — the UI says so</a:t>
+              <a:t>Reasoning path still uses the grounded extractive backend, not the 3B LLM</a:t>
             </a:r>
             <a:endParaRPr lang="en-US" sz="1300" dirty="0"/>
           </a:p>
@@ -7398,7 +7398,28 @@
                 <a:ea typeface="Calibri" pitchFamily="34" charset="-122"/>
                 <a:cs typeface="Calibri" pitchFamily="34" charset="-120"/>
               </a:rPr>
-              <a:t>Document capture (OCR) is stubbed</a:t>
+              <a:t>Marathi, Bengali, Punjabi have no working checkpoint — the UI says so</a:t>
+            </a:r>
+            <a:endParaRPr lang="en-US" sz="1300" dirty="0"/>
+          </a:p>
+          <a:p>
+            <a:pPr marL="342900" indent="-342900">
+              <a:spcAft>
+                <a:spcPts val="800"/>
+              </a:spcAft>
+              <a:buSzPct val="100000"/>
+              <a:buChar char="•"/>
+            </a:pPr>
+            <a:r>
+              <a:rPr lang="en-US" sz="1300" dirty="0">
+                <a:solidFill>
+                  <a:srgbClr val="0D1420"/>
+                </a:solidFill>
+                <a:latin typeface="Calibri" pitchFamily="34" charset="0"/>
+                <a:ea typeface="Calibri" pitchFamily="34" charset="-122"/>
+                <a:cs typeface="Calibri" pitchFamily="34" charset="-120"/>
+              </a:rPr>
+              <a:t>Document scanning uses the OS engine, not our own NPU graphs</a:t>
             </a:r>
             <a:endParaRPr lang="en-US" sz="1300" dirty="0"/>
           </a:p>
